--- a/deck/令和の虎_事業計画書_三現ワークス.pptx
+++ b/deck/令和の虎_事業計画書_三現ワークス.pptx
@@ -3575,7 +3575,7 @@
               <a:rPr lang="en-US" dirty="0"/>
               <a:t>【3:50 - 4:30】
 要約：狙う市場は約100億円。周辺市場は年7〜9%で伸びている
-市場規模です。土台となる国内のスマートファクトリー市場は、2025年の42億ドルから年9%で伸びる見込みです。建設テック市場も2030年度に3,000億円を超えます。当社が狙うのは、電線・ケーブル工場の353事業所と、中堅以上の電気工事会社約3,000社。年300万円をかけると約100億円の市場です。5年目に85拠点、シェア2.5%を取りに行きます。</a:t>
+市場規模です。土台となる国内のスマートファクトリー市場は、2025年の42億ドルから年9%で伸びる見込みです。建設テック市場も、建築分野だけで2030年度に約3,040億円、年7.4%の成長です。当社が狙うのは、電線・ケーブル工場の353事業所と、中堅以上の電気工事会社約3,000社。年300万円をかけると約100億円の市場です。5年目に85拠点、シェア2.5%を取りに行きます。</a:t>
             </a:r>
             <a:endParaRPr lang="en-US" dirty="0"/>
           </a:p>
@@ -3755,7 +3755,7 @@
               <a:rPr lang="en-US" dirty="0"/>
               <a:t>【5:15 - 5:55】
 要約：売上は拠点数×月25万円で積み上がる。5年目は月2,400万円
-売上と費用です。売上は、拠点数かける月25万円の利用料が積み上がる形です。5年目の月次売上は約2,400万円で、内訳は利用料が約1,790万円、導入支援が約550万円です。費用の中心は人件費で、1人あたり年800万円。家賃は1年目月20万円、5年目月50万円、広告と展示会は1年目200万円から5年目500万円を見込んでいます。</a:t>
+売上と費用です。売上は、拠点数かける月25万円の利用料が積み上がる形です。5年目の月次売上は約2,400万円で、内訳は利用料が約1,790万円、導入支援が約550万円です。費用の中心は人件費で、1人あたり年800万円。所在地は川崎市を考えています。京浜の工場地帯と羽田・新幹線に近く、関東の電線工場と東京の電気工事会社の両方に出やすい場所です。家賃は1年目15坪で月20万円、5年目40坪で月50万円、広告と展示会は1年目200万円から5年目500万円を見込んでいます。</a:t>
             </a:r>
             <a:endParaRPr lang="en-US" dirty="0"/>
           </a:p>
@@ -3867,8 +3867,8 @@
         </p:blipFill>
         <p:spPr>
           <a:xfrm>
-            <a:off x="8613648" y="201168"/>
-            <a:ext cx="274320" cy="274320"/>
+            <a:off x="7452360" y="4754880"/>
+            <a:ext cx="1325880" cy="284117"/>
           </a:xfrm>
           <a:prstGeom prst="rect">
             <a:avLst/>
@@ -3883,8 +3883,8 @@
         </p:nvSpPr>
         <p:spPr>
           <a:xfrm>
-            <a:off x="5760720" y="4846320"/>
-            <a:ext cx="2651760" cy="201168"/>
+            <a:off x="731520" y="4837176"/>
+            <a:ext cx="3200400" cy="201168"/>
           </a:xfrm>
           <a:prstGeom prst="rect">
             <a:avLst/>
@@ -3896,7 +3896,7 @@
           <a:bodyPr wrap="square" lIns="0" tIns="0" rIns="0" bIns="0" rtlCol="0" anchor="ctr"/>
           <a:lstStyle/>
           <a:p>
-            <a:pPr algn="r" indent="0" marL="0">
+            <a:pPr algn="l" indent="0" marL="0">
               <a:buNone/>
             </a:pPr>
             <a:r>
@@ -3926,8 +3926,8 @@
         </p:nvSpPr>
         <p:spPr>
           <a:xfrm>
-            <a:off x="8503920" y="4846320"/>
-            <a:ext cx="365760" cy="201168"/>
+            <a:off x="365760" y="4837176"/>
+            <a:ext cx="320040" cy="201168"/>
           </a:xfrm>
           <a:prstGeom prst="rect">
             <a:avLst/>
@@ -3953,7 +3953,7 @@
             </a:lvl1pPr>
           </a:lstStyle>
           <a:p>
-            <a:pPr algn="r"/>
+            <a:pPr algn="l"/>
             <a:fld id="{F7021451-1387-4CA6-816F-3879F97B5CBC}" type="slidenum">
               <a:rPr b="0" lang="en-US"/>
               <a:t>1002</a:t>
@@ -3962,6 +3962,62 @@
           </a:p>
         </p:txBody>
       </p:sp>
+    </p:spTree>
+  </p:cSld>
+  <p:clrMapOvr>
+    <a:masterClrMapping/>
+  </p:clrMapOvr>
+</p:sldLayout>
+</file>
+
+<file path=ppt/slideLayouts/slideLayout3.xml><?xml version="1.0" encoding="utf-8"?>
+<p:sldLayout xmlns:a="http://schemas.openxmlformats.org/drawingml/2006/main" xmlns:r="http://schemas.openxmlformats.org/officeDocument/2006/relationships" xmlns:p="http://schemas.openxmlformats.org/presentationml/2006/main" preserve="1">
+  <p:cSld name="GR_COVER">
+    <p:bg>
+      <p:bgPr>
+        <a:solidFill>
+          <a:srgbClr val="FFFFFF"/>
+        </a:solidFill>
+      </p:bgPr>
+    </p:bg>
+    <p:spTree>
+      <p:nvGrpSpPr>
+        <p:cNvPr id="1" name=""/>
+        <p:cNvGrpSpPr/>
+        <p:nvPr/>
+      </p:nvGrpSpPr>
+      <p:grpSpPr>
+        <a:xfrm>
+          <a:off x="0" y="0"/>
+          <a:ext cx="0" cy="0"/>
+          <a:chOff x="0" y="0"/>
+          <a:chExt cx="0" cy="0"/>
+        </a:xfrm>
+      </p:grpSpPr>
+      <p:pic>
+        <p:nvPicPr>
+          <p:cNvPr id="2" name="Image 0" descr="preencoded.png">    </p:cNvPr>
+          <p:cNvPicPr>
+            <a:picLocks noChangeAspect="1"/>
+          </p:cNvPicPr>
+          <p:nvPr/>
+        </p:nvPicPr>
+        <p:blipFill>
+          <a:blip r:embed="rId1"/>
+          <a:stretch>
+            <a:fillRect/>
+          </a:stretch>
+        </p:blipFill>
+        <p:spPr>
+          <a:xfrm>
+            <a:off x="7452360" y="4754880"/>
+            <a:ext cx="1325880" cy="284117"/>
+          </a:xfrm>
+          <a:prstGeom prst="rect">
+            <a:avLst/>
+          </a:prstGeom>
+        </p:spPr>
+      </p:pic>
     </p:spTree>
   </p:cSld>
   <p:clrMapOvr>
@@ -3999,8 +4055,8 @@
         </p:nvSpPr>
         <p:spPr>
           <a:xfrm>
-            <a:off x="8503920" y="4846320"/>
-            <a:ext cx="365760" cy="201168"/>
+            <a:off x="365760" y="4837176"/>
+            <a:ext cx="320040" cy="201168"/>
           </a:xfrm>
           <a:prstGeom prst="rect">
             <a:avLst/>
@@ -4026,7 +4082,7 @@
             </a:lvl1pPr>
           </a:lstStyle>
           <a:p>
-            <a:pPr algn="r"/>
+            <a:pPr algn="l"/>
             <a:fld id="{F7021451-1387-4CA6-816F-3879F97B5CBC}" type="slidenum">
               <a:rPr b="0" lang="en-US"/>
               <a:t>null</a:t>
@@ -4041,6 +4097,7 @@
   <p:sldLayoutIdLst>
     <p:sldLayoutId id="2147483649" r:id="rId1"/>
     <p:sldLayoutId id="2147483650" r:id="rId2"/>
+    <p:sldLayoutId id="2147483651" r:id="rId3"/>
   </p:sldLayoutIdLst>
   <p:hf sldNum="0" hdr="0" ftr="0" dt="0"/>
   <p:txStyles>
@@ -4349,8 +4406,8 @@
         </p:blipFill>
         <p:spPr>
           <a:xfrm>
-            <a:off x="320040" y="1005840"/>
-            <a:ext cx="2651760" cy="640080"/>
+            <a:off x="320040" y="960120"/>
+            <a:ext cx="2743200" cy="587829"/>
           </a:xfrm>
           <a:prstGeom prst="rect">
             <a:avLst/>
@@ -4666,9 +4723,9 @@
           <a:solidFill>
             <a:srgbClr val="FFFFFF"/>
           </a:solidFill>
-          <a:ln w="19050">
+          <a:ln w="25400">
             <a:solidFill>
-              <a:srgbClr val="1A1A1A"/>
+              <a:srgbClr val="B8692E"/>
             </a:solidFill>
             <a:prstDash val="solid"/>
           </a:ln>
@@ -4746,7 +4803,7 @@
             <a:r>
               <a:rPr lang="en-US" sz="4400" b="1" dirty="0">
                 <a:solidFill>
-                  <a:srgbClr val="1A1A1A"/>
+                  <a:srgbClr val="B8692E"/>
                 </a:solidFill>
                 <a:latin typeface="Meiryo" pitchFamily="34" charset="0"/>
                 <a:ea typeface="Meiryo" pitchFamily="34" charset="-122"/>
@@ -4859,54 +4916,6 @@
               <a:t>志願者：＿＿＿＿＿＿＿＿＿＿</a:t>
             </a:r>
             <a:endParaRPr lang="en-US" sz="1050" dirty="0"/>
-          </a:p>
-        </p:txBody>
-      </p:sp>
-      <p:sp>
-        <p:nvSpPr>
-          <p:cNvPr id="25" name="Slide Number Placeholder 0"/>
-          <p:cNvSpPr>
-            <a:spLocks noGrp="1"/>
-          </p:cNvSpPr>
-          <p:nvPr>
-            <p:ph type="sldNum" sz="quarter" idx="4294967295"/>
-          </p:nvPr>
-        </p:nvSpPr>
-        <p:spPr>
-          <a:xfrm>
-            <a:off x="8503920" y="4846320"/>
-            <a:ext cx="365760" cy="201168"/>
-          </a:xfrm>
-          <a:prstGeom prst="rect">
-            <a:avLst/>
-          </a:prstGeom>
-          <a:extLst>
-            <a:ext uri="{C572A759-6A51-4108-AA02-DFA0A04FC94B}">
-              <ma14:wrappingTextBoxFlag xmlns:ma14="http://schemas.microsoft.com/office/mac/drawingml/2011/main" val="0"/>
-            </a:ext>
-          </a:extLst>
-        </p:spPr>
-        <p:txBody>
-          <a:bodyPr lIns="0" tIns="0" rIns="0" bIns="0"/>
-          <a:lstStyle>
-            <a:lvl1pPr>
-              <a:defRPr sz="850">
-                <a:solidFill>
-                  <a:srgbClr val="8C8C8C"/>
-                </a:solidFill>
-                <a:latin typeface="Meiryo"/>
-                <a:ea typeface="Meiryo"/>
-                <a:cs typeface="Meiryo"/>
-              </a:defRPr>
-            </a:lvl1pPr>
-          </a:lstStyle>
-          <a:p>
-            <a:pPr algn="r"/>
-            <a:fld id="{F7021451-1387-4CA6-816F-3879F97B5CBC}" type="slidenum">
-              <a:rPr b="0" lang="en-US"/>
-              <a:t>1</a:t>
-            </a:fld>
-            <a:endParaRPr lang="en-US"/>
           </a:p>
         </p:txBody>
       </p:sp>
@@ -4965,13 +4974,30 @@
             <a:r>
               <a:rPr lang="en-US" sz="2000" b="1" dirty="0">
                 <a:solidFill>
+                  <a:srgbClr val="B8692E"/>
+                </a:solidFill>
+                <a:latin typeface="Meiryo" pitchFamily="34" charset="0"/>
+                <a:ea typeface="Meiryo" pitchFamily="34" charset="-122"/>
+                <a:cs typeface="Meiryo" pitchFamily="34" charset="-120"/>
+              </a:rPr>
+              <a:t>⑥ </a:t>
+            </a:r>
+            <a:pPr algn="l" indent="0" marL="0">
+              <a:lnSpc>
+                <a:spcPct val="115000"/>
+              </a:lnSpc>
+              <a:buNone/>
+            </a:pPr>
+            <a:r>
+              <a:rPr lang="en-US" sz="2000" b="1" dirty="0">
+                <a:solidFill>
                   <a:srgbClr val="1A1A1A"/>
                 </a:solidFill>
                 <a:latin typeface="Meiryo" pitchFamily="34" charset="0"/>
                 <a:ea typeface="Meiryo" pitchFamily="34" charset="-122"/>
                 <a:cs typeface="Meiryo" pitchFamily="34" charset="-120"/>
               </a:rPr>
-              <a:t>⑥ 損益分岐点 ─ 4年目に超え、5年目の余裕率は32%</a:t>
+              <a:t>損益分岐点 ─ 4年目に超え、5年目の余裕率は32%</a:t>
             </a:r>
             <a:endParaRPr lang="en-US" sz="2000" dirty="0"/>
           </a:p>
@@ -6550,8 +6576,8 @@
         </p:nvSpPr>
         <p:spPr>
           <a:xfrm>
-            <a:off x="8503920" y="4846320"/>
-            <a:ext cx="365760" cy="201168"/>
+            <a:off x="365760" y="4837176"/>
+            <a:ext cx="320040" cy="201168"/>
           </a:xfrm>
           <a:prstGeom prst="rect">
             <a:avLst/>
@@ -6577,7 +6603,7 @@
             </a:lvl1pPr>
           </a:lstStyle>
           <a:p>
-            <a:pPr algn="r"/>
+            <a:pPr algn="l"/>
             <a:fld id="{F7021451-1387-4CA6-816F-3879F97B5CBC}" type="slidenum">
               <a:rPr b="0" lang="en-US"/>
               <a:t>10</a:t>
@@ -6641,13 +6667,30 @@
             <a:r>
               <a:rPr lang="en-US" sz="2000" b="1" dirty="0">
                 <a:solidFill>
+                  <a:srgbClr val="B8692E"/>
+                </a:solidFill>
+                <a:latin typeface="Meiryo" pitchFamily="34" charset="0"/>
+                <a:ea typeface="Meiryo" pitchFamily="34" charset="-122"/>
+                <a:cs typeface="Meiryo" pitchFamily="34" charset="-120"/>
+              </a:rPr>
+              <a:t>⑥ </a:t>
+            </a:r>
+            <a:pPr algn="l" indent="0" marL="0">
+              <a:lnSpc>
+                <a:spcPct val="115000"/>
+              </a:lnSpc>
+              <a:buNone/>
+            </a:pPr>
+            <a:r>
+              <a:rPr lang="en-US" sz="2000" b="1" dirty="0">
+                <a:solidFill>
                   <a:srgbClr val="1A1A1A"/>
                 </a:solidFill>
                 <a:latin typeface="Meiryo" pitchFamily="34" charset="0"/>
                 <a:ea typeface="Meiryo" pitchFamily="34" charset="-122"/>
                 <a:cs typeface="Meiryo" pitchFamily="34" charset="-120"/>
               </a:rPr>
-              <a:t>⑥ 資金計画・CF ─ 黒字倒産させない仕組みを先に置く</a:t>
+              <a:t>資金計画・CF ─ 黒字倒産させない仕組みを先に置く</a:t>
             </a:r>
             <a:endParaRPr lang="en-US" sz="2000" dirty="0"/>
           </a:p>
@@ -8351,8 +8394,8 @@
         </p:nvSpPr>
         <p:spPr>
           <a:xfrm>
-            <a:off x="8503920" y="4846320"/>
-            <a:ext cx="365760" cy="201168"/>
+            <a:off x="365760" y="4837176"/>
+            <a:ext cx="320040" cy="201168"/>
           </a:xfrm>
           <a:prstGeom prst="rect">
             <a:avLst/>
@@ -8378,7 +8421,7 @@
             </a:lvl1pPr>
           </a:lstStyle>
           <a:p>
-            <a:pPr algn="r"/>
+            <a:pPr algn="l"/>
             <a:fld id="{F7021451-1387-4CA6-816F-3879F97B5CBC}" type="slidenum">
               <a:rPr b="0" lang="en-US"/>
               <a:t>11</a:t>
@@ -8442,13 +8485,30 @@
             <a:r>
               <a:rPr lang="en-US" sz="2000" b="1" dirty="0">
                 <a:solidFill>
+                  <a:srgbClr val="B8692E"/>
+                </a:solidFill>
+                <a:latin typeface="Meiryo" pitchFamily="34" charset="0"/>
+                <a:ea typeface="Meiryo" pitchFamily="34" charset="-122"/>
+                <a:cs typeface="Meiryo" pitchFamily="34" charset="-120"/>
+              </a:rPr>
+              <a:t>⑦ </a:t>
+            </a:r>
+            <a:pPr algn="l" indent="0" marL="0">
+              <a:lnSpc>
+                <a:spcPct val="115000"/>
+              </a:lnSpc>
+              <a:buNone/>
+            </a:pPr>
+            <a:r>
+              <a:rPr lang="en-US" sz="2000" b="1" dirty="0">
+                <a:solidFill>
                   <a:srgbClr val="1A1A1A"/>
                 </a:solidFill>
                 <a:latin typeface="Meiryo" pitchFamily="34" charset="0"/>
                 <a:ea typeface="Meiryo" pitchFamily="34" charset="-122"/>
                 <a:cs typeface="Meiryo" pitchFamily="34" charset="-120"/>
               </a:rPr>
-              <a:t>⑦ チーム ─ 現場と技術を揃え、顧問とパートナーで補う</a:t>
+              <a:t>チーム ─ 現場と技術を揃え、顧問とパートナーで補う</a:t>
             </a:r>
             <a:endParaRPr lang="en-US" sz="2000" dirty="0"/>
           </a:p>
@@ -10336,8 +10396,8 @@
         </p:nvSpPr>
         <p:spPr>
           <a:xfrm>
-            <a:off x="8503920" y="4846320"/>
-            <a:ext cx="365760" cy="201168"/>
+            <a:off x="365760" y="4837176"/>
+            <a:ext cx="320040" cy="201168"/>
           </a:xfrm>
           <a:prstGeom prst="rect">
             <a:avLst/>
@@ -10363,7 +10423,7 @@
             </a:lvl1pPr>
           </a:lstStyle>
           <a:p>
-            <a:pPr algn="r"/>
+            <a:pPr algn="l"/>
             <a:fld id="{F7021451-1387-4CA6-816F-3879F97B5CBC}" type="slidenum">
               <a:rPr b="0" lang="en-US"/>
               <a:t>12</a:t>
@@ -11259,8 +11319,8 @@
         </p:nvSpPr>
         <p:spPr>
           <a:xfrm>
-            <a:off x="8503920" y="4846320"/>
-            <a:ext cx="365760" cy="201168"/>
+            <a:off x="365760" y="4837176"/>
+            <a:ext cx="320040" cy="201168"/>
           </a:xfrm>
           <a:prstGeom prst="rect">
             <a:avLst/>
@@ -11286,7 +11346,7 @@
             </a:lvl1pPr>
           </a:lstStyle>
           <a:p>
-            <a:pPr algn="r"/>
+            <a:pPr algn="l"/>
             <a:fld id="{F7021451-1387-4CA6-816F-3879F97B5CBC}" type="slidenum">
               <a:rPr b="0" lang="en-US"/>
               <a:t>13</a:t>
@@ -12723,8 +12783,8 @@
         </p:nvSpPr>
         <p:spPr>
           <a:xfrm>
-            <a:off x="8503920" y="4846320"/>
-            <a:ext cx="365760" cy="201168"/>
+            <a:off x="365760" y="4837176"/>
+            <a:ext cx="320040" cy="201168"/>
           </a:xfrm>
           <a:prstGeom prst="rect">
             <a:avLst/>
@@ -12750,7 +12810,7 @@
             </a:lvl1pPr>
           </a:lstStyle>
           <a:p>
-            <a:pPr algn="r"/>
+            <a:pPr algn="l"/>
             <a:fld id="{F7021451-1387-4CA6-816F-3879F97B5CBC}" type="slidenum">
               <a:rPr b="0" lang="en-US"/>
               <a:t>14</a:t>
@@ -13542,8 +13602,8 @@
         </p:nvSpPr>
         <p:spPr>
           <a:xfrm>
-            <a:off x="8503920" y="4846320"/>
-            <a:ext cx="365760" cy="201168"/>
+            <a:off x="365760" y="4837176"/>
+            <a:ext cx="320040" cy="201168"/>
           </a:xfrm>
           <a:prstGeom prst="rect">
             <a:avLst/>
@@ -13569,7 +13629,7 @@
             </a:lvl1pPr>
           </a:lstStyle>
           <a:p>
-            <a:pPr algn="r"/>
+            <a:pPr algn="l"/>
             <a:fld id="{F7021451-1387-4CA6-816F-3879F97B5CBC}" type="slidenum">
               <a:rPr b="0" lang="en-US"/>
               <a:t>15</a:t>
@@ -13633,13 +13693,30 @@
             <a:r>
               <a:rPr lang="en-US" sz="2000" b="1" dirty="0">
                 <a:solidFill>
+                  <a:srgbClr val="B8692E"/>
+                </a:solidFill>
+                <a:latin typeface="Meiryo" pitchFamily="34" charset="0"/>
+                <a:ea typeface="Meiryo" pitchFamily="34" charset="-122"/>
+                <a:cs typeface="Meiryo" pitchFamily="34" charset="-120"/>
+              </a:rPr>
+              <a:t>① </a:t>
+            </a:r>
+            <a:pPr algn="l" indent="0" marL="0">
+              <a:lnSpc>
+                <a:spcPct val="115000"/>
+              </a:lnSpc>
+              <a:buNone/>
+            </a:pPr>
+            <a:r>
+              <a:rPr lang="en-US" sz="2000" b="1" dirty="0">
+                <a:solidFill>
                   <a:srgbClr val="1A1A1A"/>
                 </a:solidFill>
                 <a:latin typeface="Meiryo" pitchFamily="34" charset="0"/>
                 <a:ea typeface="Meiryo" pitchFamily="34" charset="-122"/>
                 <a:cs typeface="Meiryo" pitchFamily="34" charset="-120"/>
               </a:rPr>
-              <a:t>① 事業概要 ─ 現場の作業を記録し、報告と教育を自動に</a:t>
+              <a:t>事業概要 ─ 現場の作業を記録し、報告と教育を自動に</a:t>
             </a:r>
             <a:endParaRPr lang="en-US" sz="2000" dirty="0"/>
           </a:p>
@@ -14157,8 +14234,8 @@
         </p:nvSpPr>
         <p:spPr>
           <a:xfrm>
-            <a:off x="8503920" y="4846320"/>
-            <a:ext cx="365760" cy="201168"/>
+            <a:off x="365760" y="4837176"/>
+            <a:ext cx="320040" cy="201168"/>
           </a:xfrm>
           <a:prstGeom prst="rect">
             <a:avLst/>
@@ -14184,7 +14261,7 @@
             </a:lvl1pPr>
           </a:lstStyle>
           <a:p>
-            <a:pPr algn="r"/>
+            <a:pPr algn="l"/>
             <a:fld id="{F7021451-1387-4CA6-816F-3879F97B5CBC}" type="slidenum">
               <a:rPr b="0" lang="en-US"/>
               <a:t>2</a:t>
@@ -14248,13 +14325,30 @@
             <a:r>
               <a:rPr lang="en-US" sz="2000" b="1" dirty="0">
                 <a:solidFill>
+                  <a:srgbClr val="B8692E"/>
+                </a:solidFill>
+                <a:latin typeface="Meiryo" pitchFamily="34" charset="0"/>
+                <a:ea typeface="Meiryo" pitchFamily="34" charset="-122"/>
+                <a:cs typeface="Meiryo" pitchFamily="34" charset="-120"/>
+              </a:rPr>
+              <a:t>② </a:t>
+            </a:r>
+            <a:pPr algn="l" indent="0" marL="0">
+              <a:lnSpc>
+                <a:spcPct val="115000"/>
+              </a:lnSpc>
+              <a:buNone/>
+            </a:pPr>
+            <a:r>
+              <a:rPr lang="en-US" sz="2000" b="1" dirty="0">
+                <a:solidFill>
                   <a:srgbClr val="1A1A1A"/>
                 </a:solidFill>
                 <a:latin typeface="Meiryo" pitchFamily="34" charset="0"/>
                 <a:ea typeface="Meiryo" pitchFamily="34" charset="-122"/>
                 <a:cs typeface="Meiryo" pitchFamily="34" charset="-120"/>
               </a:rPr>
-              <a:t>② 課題 ─ 報告と育成に追われ、熟練者が辞めると止まる</a:t>
+              <a:t>課題 ─ 報告と育成に追われ、熟練者が辞めると止まる</a:t>
             </a:r>
             <a:endParaRPr lang="en-US" sz="2000" dirty="0"/>
           </a:p>
@@ -15366,8 +15460,8 @@
         </p:nvSpPr>
         <p:spPr>
           <a:xfrm>
-            <a:off x="8503920" y="4846320"/>
-            <a:ext cx="365760" cy="201168"/>
+            <a:off x="365760" y="4837176"/>
+            <a:ext cx="320040" cy="201168"/>
           </a:xfrm>
           <a:prstGeom prst="rect">
             <a:avLst/>
@@ -15393,7 +15487,7 @@
             </a:lvl1pPr>
           </a:lstStyle>
           <a:p>
-            <a:pPr algn="r"/>
+            <a:pPr algn="l"/>
             <a:fld id="{F7021451-1387-4CA6-816F-3879F97B5CBC}" type="slidenum">
               <a:rPr b="0" lang="en-US"/>
               <a:t>3</a:t>
@@ -15457,13 +15551,30 @@
             <a:r>
               <a:rPr lang="en-US" sz="2000" b="1" dirty="0">
                 <a:solidFill>
+                  <a:srgbClr val="B8692E"/>
+                </a:solidFill>
+                <a:latin typeface="Meiryo" pitchFamily="34" charset="0"/>
+                <a:ea typeface="Meiryo" pitchFamily="34" charset="-122"/>
+                <a:cs typeface="Meiryo" pitchFamily="34" charset="-120"/>
+              </a:rPr>
+              <a:t>③ </a:t>
+            </a:r>
+            <a:pPr algn="l" indent="0" marL="0">
+              <a:lnSpc>
+                <a:spcPct val="115000"/>
+              </a:lnSpc>
+              <a:buNone/>
+            </a:pPr>
+            <a:r>
+              <a:rPr lang="en-US" sz="2000" b="1" dirty="0">
+                <a:solidFill>
                   <a:srgbClr val="1A1A1A"/>
                 </a:solidFill>
                 <a:latin typeface="Meiryo" pitchFamily="34" charset="0"/>
                 <a:ea typeface="Meiryo" pitchFamily="34" charset="-122"/>
                 <a:cs typeface="Meiryo" pitchFamily="34" charset="-120"/>
               </a:rPr>
-              <a:t>③ 解決策 ─ 記録は自動。貯まるほど真似されにくい</a:t>
+              <a:t>解決策 ─ 記録は自動。貯まるほど真似されにくい</a:t>
             </a:r>
             <a:endParaRPr lang="en-US" sz="2000" dirty="0"/>
           </a:p>
@@ -16048,8 +16159,8 @@
         </p:nvSpPr>
         <p:spPr>
           <a:xfrm>
-            <a:off x="8503920" y="4846320"/>
-            <a:ext cx="365760" cy="201168"/>
+            <a:off x="365760" y="4837176"/>
+            <a:ext cx="320040" cy="201168"/>
           </a:xfrm>
           <a:prstGeom prst="rect">
             <a:avLst/>
@@ -16075,7 +16186,7 @@
             </a:lvl1pPr>
           </a:lstStyle>
           <a:p>
-            <a:pPr algn="r"/>
+            <a:pPr algn="l"/>
             <a:fld id="{F7021451-1387-4CA6-816F-3879F97B5CBC}" type="slidenum">
               <a:rPr b="0" lang="en-US"/>
               <a:t>4</a:t>
@@ -16139,13 +16250,30 @@
             <a:r>
               <a:rPr lang="en-US" sz="2000" b="1" dirty="0">
                 <a:solidFill>
+                  <a:srgbClr val="B8692E"/>
+                </a:solidFill>
+                <a:latin typeface="Meiryo" pitchFamily="34" charset="0"/>
+                <a:ea typeface="Meiryo" pitchFamily="34" charset="-122"/>
+                <a:cs typeface="Meiryo" pitchFamily="34" charset="-120"/>
+              </a:rPr>
+              <a:t>③ </a:t>
+            </a:r>
+            <a:pPr algn="l" indent="0" marL="0">
+              <a:lnSpc>
+                <a:spcPct val="115000"/>
+              </a:lnSpc>
+              <a:buNone/>
+            </a:pPr>
+            <a:r>
+              <a:rPr lang="en-US" sz="2000" b="1" dirty="0">
+                <a:solidFill>
                   <a:srgbClr val="1A1A1A"/>
                 </a:solidFill>
                 <a:latin typeface="Meiryo" pitchFamily="34" charset="0"/>
                 <a:ea typeface="Meiryo" pitchFamily="34" charset="-122"/>
                 <a:cs typeface="Meiryo" pitchFamily="34" charset="-120"/>
               </a:rPr>
-              <a:t>③ デモ ─ 図面との差異を見つけ、報告書が自動でできる</a:t>
+              <a:t>デモ ─ 図面との差異を見つけ、報告書が自動でできる</a:t>
             </a:r>
             <a:endParaRPr lang="en-US" sz="2000" dirty="0"/>
           </a:p>
@@ -16691,8 +16819,8 @@
         </p:nvSpPr>
         <p:spPr>
           <a:xfrm>
-            <a:off x="8503920" y="4846320"/>
-            <a:ext cx="365760" cy="201168"/>
+            <a:off x="365760" y="4837176"/>
+            <a:ext cx="320040" cy="201168"/>
           </a:xfrm>
           <a:prstGeom prst="rect">
             <a:avLst/>
@@ -16718,7 +16846,7 @@
             </a:lvl1pPr>
           </a:lstStyle>
           <a:p>
-            <a:pPr algn="r"/>
+            <a:pPr algn="l"/>
             <a:fld id="{F7021451-1387-4CA6-816F-3879F97B5CBC}" type="slidenum">
               <a:rPr b="0" lang="en-US"/>
               <a:t>5</a:t>
@@ -16782,13 +16910,30 @@
             <a:r>
               <a:rPr lang="en-US" sz="2000" b="1" dirty="0">
                 <a:solidFill>
+                  <a:srgbClr val="B8692E"/>
+                </a:solidFill>
+                <a:latin typeface="Meiryo" pitchFamily="34" charset="0"/>
+                <a:ea typeface="Meiryo" pitchFamily="34" charset="-122"/>
+                <a:cs typeface="Meiryo" pitchFamily="34" charset="-120"/>
+              </a:rPr>
+              <a:t>③ </a:t>
+            </a:r>
+            <a:pPr algn="l" indent="0" marL="0">
+              <a:lnSpc>
+                <a:spcPct val="115000"/>
+              </a:lnSpc>
+              <a:buNone/>
+            </a:pPr>
+            <a:r>
+              <a:rPr lang="en-US" sz="2000" b="1" dirty="0">
+                <a:solidFill>
                   <a:srgbClr val="1A1A1A"/>
                 </a:solidFill>
                 <a:latin typeface="Meiryo" pitchFamily="34" charset="0"/>
                 <a:ea typeface="Meiryo" pitchFamily="34" charset="-122"/>
                 <a:cs typeface="Meiryo" pitchFamily="34" charset="-120"/>
               </a:rPr>
-              <a:t>③ 競合 ─ 「貯める」会社は現れた。当社は「渡す」で分かれる</a:t>
+              <a:t>競合 ─ 「貯める」会社は現れた。当社は「渡す」で分かれる</a:t>
             </a:r>
             <a:endParaRPr lang="en-US" sz="2000" dirty="0"/>
           </a:p>
@@ -19652,8 +19797,8 @@
         </p:nvSpPr>
         <p:spPr>
           <a:xfrm>
-            <a:off x="8503920" y="4846320"/>
-            <a:ext cx="365760" cy="201168"/>
+            <a:off x="365760" y="4837176"/>
+            <a:ext cx="320040" cy="201168"/>
           </a:xfrm>
           <a:prstGeom prst="rect">
             <a:avLst/>
@@ -19679,7 +19824,7 @@
             </a:lvl1pPr>
           </a:lstStyle>
           <a:p>
-            <a:pPr algn="r"/>
+            <a:pPr algn="l"/>
             <a:fld id="{F7021451-1387-4CA6-816F-3879F97B5CBC}" type="slidenum">
               <a:rPr b="0" lang="en-US"/>
               <a:t>6</a:t>
@@ -19743,13 +19888,30 @@
             <a:r>
               <a:rPr lang="en-US" sz="2000" b="1" dirty="0">
                 <a:solidFill>
+                  <a:srgbClr val="B8692E"/>
+                </a:solidFill>
+                <a:latin typeface="Meiryo" pitchFamily="34" charset="0"/>
+                <a:ea typeface="Meiryo" pitchFamily="34" charset="-122"/>
+                <a:cs typeface="Meiryo" pitchFamily="34" charset="-120"/>
+              </a:rPr>
+              <a:t>④ </a:t>
+            </a:r>
+            <a:pPr algn="l" indent="0" marL="0">
+              <a:lnSpc>
+                <a:spcPct val="115000"/>
+              </a:lnSpc>
+              <a:buNone/>
+            </a:pPr>
+            <a:r>
+              <a:rPr lang="en-US" sz="2000" b="1" dirty="0">
+                <a:solidFill>
                   <a:srgbClr val="1A1A1A"/>
                 </a:solidFill>
                 <a:latin typeface="Meiryo" pitchFamily="34" charset="0"/>
                 <a:ea typeface="Meiryo" pitchFamily="34" charset="-122"/>
                 <a:cs typeface="Meiryo" pitchFamily="34" charset="-120"/>
               </a:rPr>
-              <a:t>④ 市場規模 ─ 狙う市場は約100億円、周辺は年7〜9%成長</a:t>
+              <a:t>市場規模 ─ 狙う市場は約100億円、周辺は年7〜9%成長</a:t>
             </a:r>
             <a:endParaRPr lang="en-US" sz="2000" dirty="0"/>
           </a:p>
@@ -20295,7 +20457,7 @@
                           <a:ea typeface="Meiryo" pitchFamily="34" charset="-122"/>
                           <a:cs typeface="Meiryo" pitchFamily="34" charset="-120"/>
                         </a:rPr>
-                        <a:t>42億米ドル（2025年）</a:t>
+                        <a:t>42億→92億米ドル</a:t>
                       </a:r>
                       <a:endParaRPr lang="en-US" sz="800" dirty="0">
                         <a:latin typeface="Meiryo" charset="0"/>
@@ -20345,7 +20507,7 @@
                           <a:ea typeface="Meiryo" pitchFamily="34" charset="-122"/>
                           <a:cs typeface="Meiryo" pitchFamily="34" charset="-120"/>
                         </a:rPr>
-                        <a:t>国内スマートファクトリー市場 (1)</a:t>
+                        <a:t>国内スマートファクトリー市場 2025→2034年 (1)</a:t>
                       </a:r>
                       <a:endParaRPr lang="en-US" sz="800" dirty="0">
                         <a:latin typeface="Meiryo" charset="0"/>
@@ -20447,7 +20609,7 @@
                           <a:ea typeface="Meiryo" pitchFamily="34" charset="-122"/>
                           <a:cs typeface="Meiryo" pitchFamily="34" charset="-120"/>
                         </a:rPr>
-                        <a:t>1,845億円→3,000億円超</a:t>
+                        <a:t>1,845億円→3,043億円</a:t>
                       </a:r>
                       <a:endParaRPr lang="en-US" sz="800" dirty="0">
                         <a:latin typeface="Meiryo" charset="0"/>
@@ -20497,7 +20659,7 @@
                           <a:ea typeface="Meiryo" pitchFamily="34" charset="-122"/>
                           <a:cs typeface="Meiryo" pitchFamily="34" charset="-120"/>
                         </a:rPr>
-                        <a:t>国内建設テック市場 2023→2030年度 (2)</a:t>
+                        <a:t>国内建設テック市場（建築分野）2023→2030年度 (2)</a:t>
                       </a:r>
                       <a:endParaRPr lang="en-US" sz="800" dirty="0">
                         <a:latin typeface="Meiryo" charset="0"/>
@@ -20940,7 +21102,7 @@
                 <a:ea typeface="Meiryo" pitchFamily="34" charset="-122"/>
                 <a:cs typeface="Meiryo" pitchFamily="34" charset="-120"/>
               </a:rPr>
-              <a:t>国内スマートファクトリー：年9.0%成長（2026〜2034年予測）(1)</a:t>
+              <a:t>国内スマートファクトリー：年9.03%成長（2026〜2034年予測）(1)</a:t>
             </a:r>
             <a:endParaRPr lang="en-US" sz="850" dirty="0"/>
           </a:p>
@@ -20963,7 +21125,7 @@
                 <a:ea typeface="Meiryo" pitchFamily="34" charset="-122"/>
                 <a:cs typeface="Meiryo" pitchFamily="34" charset="-120"/>
               </a:rPr>
-              <a:t>国内建設テック：年約7.2%成長（2023→2030年度から算出）(2)</a:t>
+              <a:t>国内建設テック（建築分野）：年7.4%成長（2023→2030年度予測）(2)</a:t>
             </a:r>
             <a:endParaRPr lang="en-US" sz="850" dirty="0"/>
           </a:p>
@@ -21000,8 +21162,8 @@
         </p:nvSpPr>
         <p:spPr>
           <a:xfrm>
-            <a:off x="365760" y="4517136"/>
-            <a:ext cx="8412480" cy="292608"/>
+            <a:off x="365760" y="4480560"/>
+            <a:ext cx="8412480" cy="274320"/>
           </a:xfrm>
           <a:prstGeom prst="rect">
             <a:avLst/>
@@ -21028,7 +21190,7 @@
                 <a:ea typeface="Meiryo" pitchFamily="34" charset="-122"/>
                 <a:cs typeface="Meiryo" pitchFamily="34" charset="-120"/>
               </a:rPr>
-              <a:t>(1) IMARC Group（2034年に92億米ドル、年平均9.03%）　(2) 矢野経済研究所　(3) 経済産業省「経済構造実態調査」2024年（従業者10人以上）　(4) 国土交通省「建設業許可業者数調査」の電気工事業63,144社から資本金5,000万円以上を推計（電気通信工事業を含む）</a:t>
+              <a:t>(1) IMARC Group「Japan Smart Factory Market」　(2) 矢野経済研究所 プレスリリースNo.3789（2025年4月）建築分野ソフトウェア　(3) 経済産業省「経済構造実態調査」2024年　(4) 電気工事業の許可業者65,497社（令和7年3月末、国土交通省）から推計</a:t>
             </a:r>
             <a:endParaRPr lang="en-US" sz="800" dirty="0"/>
           </a:p>
@@ -21046,8 +21208,8 @@
         </p:nvSpPr>
         <p:spPr>
           <a:xfrm>
-            <a:off x="8503920" y="4846320"/>
-            <a:ext cx="365760" cy="201168"/>
+            <a:off x="365760" y="4837176"/>
+            <a:ext cx="320040" cy="201168"/>
           </a:xfrm>
           <a:prstGeom prst="rect">
             <a:avLst/>
@@ -21073,7 +21235,7 @@
             </a:lvl1pPr>
           </a:lstStyle>
           <a:p>
-            <a:pPr algn="r"/>
+            <a:pPr algn="l"/>
             <a:fld id="{F7021451-1387-4CA6-816F-3879F97B5CBC}" type="slidenum">
               <a:rPr b="0" lang="en-US"/>
               <a:t>7</a:t>
@@ -21137,13 +21299,30 @@
             <a:r>
               <a:rPr lang="en-US" sz="2000" b="1" dirty="0">
                 <a:solidFill>
+                  <a:srgbClr val="B8692E"/>
+                </a:solidFill>
+                <a:latin typeface="Meiryo" pitchFamily="34" charset="0"/>
+                <a:ea typeface="Meiryo" pitchFamily="34" charset="-122"/>
+                <a:cs typeface="Meiryo" pitchFamily="34" charset="-120"/>
+              </a:rPr>
+              <a:t>⑤ </a:t>
+            </a:r>
+            <a:pPr algn="l" indent="0" marL="0">
+              <a:lnSpc>
+                <a:spcPct val="115000"/>
+              </a:lnSpc>
+              <a:buNone/>
+            </a:pPr>
+            <a:r>
+              <a:rPr lang="en-US" sz="2000" b="1" dirty="0">
+                <a:solidFill>
                   <a:srgbClr val="1A1A1A"/>
                 </a:solidFill>
                 <a:latin typeface="Meiryo" pitchFamily="34" charset="0"/>
                 <a:ea typeface="Meiryo" pitchFamily="34" charset="-122"/>
                 <a:cs typeface="Meiryo" pitchFamily="34" charset="-120"/>
               </a:rPr>
-              <a:t>⑤ ビジネスモデル ─ 年300万円、約2か月で元が取れる</a:t>
+              <a:t>ビジネスモデル ─ 年300万円、約2か月で元が取れる</a:t>
             </a:r>
             <a:endParaRPr lang="en-US" sz="2000" dirty="0"/>
           </a:p>
@@ -22790,8 +22969,8 @@
         </p:nvSpPr>
         <p:spPr>
           <a:xfrm>
-            <a:off x="8503920" y="4846320"/>
-            <a:ext cx="365760" cy="201168"/>
+            <a:off x="365760" y="4837176"/>
+            <a:ext cx="320040" cy="201168"/>
           </a:xfrm>
           <a:prstGeom prst="rect">
             <a:avLst/>
@@ -22817,7 +22996,7 @@
             </a:lvl1pPr>
           </a:lstStyle>
           <a:p>
-            <a:pPr algn="r"/>
+            <a:pPr algn="l"/>
             <a:fld id="{F7021451-1387-4CA6-816F-3879F97B5CBC}" type="slidenum">
               <a:rPr b="0" lang="en-US"/>
               <a:t>8</a:t>
@@ -22881,13 +23060,30 @@
             <a:r>
               <a:rPr lang="en-US" sz="2000" b="1" dirty="0">
                 <a:solidFill>
+                  <a:srgbClr val="B8692E"/>
+                </a:solidFill>
+                <a:latin typeface="Meiryo" pitchFamily="34" charset="0"/>
+                <a:ea typeface="Meiryo" pitchFamily="34" charset="-122"/>
+                <a:cs typeface="Meiryo" pitchFamily="34" charset="-120"/>
+              </a:rPr>
+              <a:t>⑥ </a:t>
+            </a:r>
+            <a:pPr algn="l" indent="0" marL="0">
+              <a:lnSpc>
+                <a:spcPct val="115000"/>
+              </a:lnSpc>
+              <a:buNone/>
+            </a:pPr>
+            <a:r>
+              <a:rPr lang="en-US" sz="2000" b="1" dirty="0">
+                <a:solidFill>
                   <a:srgbClr val="1A1A1A"/>
                 </a:solidFill>
                 <a:latin typeface="Meiryo" pitchFamily="34" charset="0"/>
                 <a:ea typeface="Meiryo" pitchFamily="34" charset="-122"/>
                 <a:cs typeface="Meiryo" pitchFamily="34" charset="-120"/>
               </a:rPr>
-              <a:t>⑥ 売上予測 ─ 拠点×月25万円。5年目は月2,400万円</a:t>
+              <a:t>売上予測 ─ 拠点×月25万円。5年目は月2,400万円</a:t>
             </a:r>
             <a:endParaRPr lang="en-US" sz="2000" dirty="0"/>
           </a:p>
@@ -25346,7 +25542,7 @@
                 <a:ea typeface="Meiryo" pitchFamily="34" charset="-122"/>
                 <a:cs typeface="Meiryo" pitchFamily="34" charset="-120"/>
               </a:rPr>
-              <a:t>人件費は1人年800万円（給与600万円＋法定福利・採用・教育200万円）。家賃は1年目月20万円・5年目月50万円</a:t>
+              <a:t>所在地案：川崎市（準備期は川崎・横浜のインキュベーション施設）。家賃は1年目15坪・月20万円、5年目40坪・月50万円。人件費は1人年800万円</a:t>
             </a:r>
             <a:endParaRPr lang="en-US" sz="800" dirty="0"/>
           </a:p>
@@ -25406,8 +25602,8 @@
         </p:nvSpPr>
         <p:spPr>
           <a:xfrm>
-            <a:off x="8503920" y="4846320"/>
-            <a:ext cx="365760" cy="201168"/>
+            <a:off x="365760" y="4837176"/>
+            <a:ext cx="320040" cy="201168"/>
           </a:xfrm>
           <a:prstGeom prst="rect">
             <a:avLst/>
@@ -25433,7 +25629,7 @@
             </a:lvl1pPr>
           </a:lstStyle>
           <a:p>
-            <a:pPr algn="r"/>
+            <a:pPr algn="l"/>
             <a:fld id="{F7021451-1387-4CA6-816F-3879F97B5CBC}" type="slidenum">
               <a:rPr b="0" lang="en-US"/>
               <a:t>9</a:t>

--- a/deck/令和の虎_事業計画書_三現ワークス.pptx
+++ b/deck/令和の虎_事業計画書_三現ワークス.pptx
@@ -1491,13 +1491,13 @@
                 <c:formatCode>General</c:formatCode>
                 <c:ptCount val="5"/>
                 <c:pt idx="0">
-                  <c:v>89</c:v>
+                  <c:v>92</c:v>
                 </c:pt>
                 <c:pt idx="1">
-                  <c:v>93</c:v>
+                  <c:v>92</c:v>
                 </c:pt>
                 <c:pt idx="2">
-                  <c:v>119</c:v>
+                  <c:v>120</c:v>
                 </c:pt>
                 <c:pt idx="3">
                   <c:v>151</c:v>
@@ -1786,7 +1786,7 @@
                   <c:v>88</c:v>
                 </c:pt>
                 <c:pt idx="5">
-                  <c:v>157</c:v>
+                  <c:v>156</c:v>
                 </c:pt>
               </c:numCache>
             </c:numRef>
@@ -5828,7 +5828,7 @@
                           <a:ea typeface="Meiryo" pitchFamily="34" charset="-122"/>
                           <a:cs typeface="Meiryo" pitchFamily="34" charset="-120"/>
                         </a:rPr>
-                        <a:t>119</a:t>
+                        <a:t>120</a:t>
                       </a:r>
                       <a:endParaRPr lang="en-US" sz="850" dirty="0">
                         <a:latin typeface="Meiryo" charset="0"/>
@@ -6558,7 +6558,7 @@
                 <a:ea typeface="Meiryo" pitchFamily="34" charset="-122"/>
                 <a:cs typeface="Meiryo" pitchFamily="34" charset="-120"/>
               </a:rPr>
-              <a:t>安全余裕率＝（売上−損益分岐点売上）÷売上。1〜2年目の損益分岐点売上は89・93百万円（売上12・48百万円）</a:t>
+              <a:t>安全余裕率＝（売上−損益分岐点売上）÷売上。1〜2年目の損益分岐点売上は92・92百万円（売上12・48百万円）</a:t>
             </a:r>
             <a:endParaRPr lang="en-US" sz="800" dirty="0"/>
           </a:p>

--- a/deck/令和の虎_事業計画書_三現ワークス.pptx
+++ b/deck/令和の虎_事業計画書_三現ワークス.pptx
@@ -20580,7 +20580,7 @@
                 <a:ea typeface="Meiryo" pitchFamily="34" charset="-122"/>
                 <a:cs typeface="Meiryo" pitchFamily="34" charset="-120"/>
               </a:rPr>
-              <a:t>1拠点あたり年300万円の利用料（基盤＋ライン数＋追加機能）が毎年積み上がる。初年度だけ導入支援200万円</a:t>
+              <a:t>1拠点あたり年300万円の利用料（基盤＋現場数＋追加機能）が毎年積み上がる。初年度だけ導入支援200万円</a:t>
             </a:r>
             <a:endParaRPr lang="en-US" sz="1100" dirty="0"/>
           </a:p>
